--- a/class/cloud_infra_mgmt/11주차_Jenkins_CICD기초/01_강의자료/1차시_CICD개념과Jenkins아키텍처.pptx
+++ b/class/cloud_infra_mgmt/11주차_Jenkins_CICD기초/01_강의자료/1차시_CICD개념과Jenkins아키텍처.pptx
@@ -9800,7 +9800,7 @@
               </a:lnSpc>
             </a:pPr>
             <a:r>
-              <a:rPr sz="1500" b="1">
+              <a:rPr sz="1700" b="1">
                 <a:solidFill>
                   <a:srgbClr val="0D9488"/>
                 </a:solidFill>
@@ -9809,7 +9809,7 @@
               <a:t>●  </a:t>
             </a:r>
             <a:r>
-              <a:rPr sz="1500" b="0">
+              <a:rPr sz="1700" b="0">
                 <a:solidFill>
                   <a:srgbClr val="222733"/>
                 </a:solidFill>
@@ -9825,7 +9825,7 @@
               </a:lnSpc>
             </a:pPr>
             <a:r>
-              <a:rPr sz="1500" b="1">
+              <a:rPr sz="1700" b="1">
                 <a:solidFill>
                   <a:srgbClr val="0D9488"/>
                 </a:solidFill>
@@ -9834,7 +9834,7 @@
               <a:t>●  </a:t>
             </a:r>
             <a:r>
-              <a:rPr sz="1500" b="0">
+              <a:rPr sz="1700" b="0">
                 <a:solidFill>
                   <a:srgbClr val="222733"/>
                 </a:solidFill>
@@ -9850,7 +9850,7 @@
               </a:lnSpc>
             </a:pPr>
             <a:r>
-              <a:rPr sz="1500" b="1">
+              <a:rPr sz="1700" b="1">
                 <a:solidFill>
                   <a:srgbClr val="0D9488"/>
                 </a:solidFill>
@@ -9859,7 +9859,7 @@
               <a:t>●  </a:t>
             </a:r>
             <a:r>
-              <a:rPr sz="1500" b="0">
+              <a:rPr sz="1700" b="0">
                 <a:solidFill>
                   <a:srgbClr val="222733"/>
                 </a:solidFill>
@@ -9875,7 +9875,7 @@
               </a:lnSpc>
             </a:pPr>
             <a:r>
-              <a:rPr sz="1500" b="1">
+              <a:rPr sz="1700" b="1">
                 <a:solidFill>
                   <a:srgbClr val="0D9488"/>
                 </a:solidFill>
@@ -9884,7 +9884,7 @@
               <a:t>●  </a:t>
             </a:r>
             <a:r>
-              <a:rPr sz="1500" b="0">
+              <a:rPr sz="1700" b="0">
                 <a:solidFill>
                   <a:srgbClr val="222733"/>
                 </a:solidFill>

--- a/class/cloud_infra_mgmt/11주차_Jenkins_CICD기초/01_강의자료/1차시_CICD개념과Jenkins아키텍처.pptx
+++ b/class/cloud_infra_mgmt/11주차_Jenkins_CICD기초/01_강의자료/1차시_CICD개념과Jenkins아키텍처.pptx
@@ -5213,7 +5213,7 @@
           <a:p>
             <a:pPr>
               <a:lnSpc>
-                <a:spcPct val="115000"/>
+                <a:spcPct val="149500"/>
               </a:lnSpc>
             </a:pPr>
             <a:r>
@@ -5238,7 +5238,7 @@
           <a:p>
             <a:pPr>
               <a:lnSpc>
-                <a:spcPct val="115000"/>
+                <a:spcPct val="149500"/>
               </a:lnSpc>
             </a:pPr>
             <a:r>
@@ -5263,7 +5263,7 @@
           <a:p>
             <a:pPr>
               <a:lnSpc>
-                <a:spcPct val="115000"/>
+                <a:spcPct val="149500"/>
               </a:lnSpc>
             </a:pPr>
             <a:r>
@@ -5654,7 +5654,7 @@
           <a:p>
             <a:pPr>
               <a:lnSpc>
-                <a:spcPct val="115000"/>
+                <a:spcPct val="149500"/>
               </a:lnSpc>
             </a:pPr>
             <a:r>
@@ -5679,7 +5679,7 @@
           <a:p>
             <a:pPr>
               <a:lnSpc>
-                <a:spcPct val="115000"/>
+                <a:spcPct val="149500"/>
               </a:lnSpc>
             </a:pPr>
             <a:r>
@@ -5704,7 +5704,7 @@
           <a:p>
             <a:pPr>
               <a:lnSpc>
-                <a:spcPct val="115000"/>
+                <a:spcPct val="149500"/>
               </a:lnSpc>
             </a:pPr>
             <a:r>
@@ -6953,16 +6953,104 @@
       </p:sp>
       <p:sp>
         <p:nvSpPr>
-          <p:cNvPr id="7" name="Isosceles Triangle 6"/>
+          <p:cNvPr id="7" name="Rectangle 6"/>
           <p:cNvSpPr/>
           <p:nvPr/>
         </p:nvSpPr>
         <p:spPr>
-          <a:xfrm rot="5400000">
-            <a:off x="3495751" y="1673352"/>
-            <a:ext cx="146304" cy="146304"/>
-          </a:xfrm>
-          <a:prstGeom prst="triangle">
+          <a:xfrm>
+            <a:off x="5096865" y="1730959"/>
+            <a:ext cx="1995220" cy="31089"/>
+          </a:xfrm>
+          <a:prstGeom prst="rect">
+            <a:avLst/>
+          </a:prstGeom>
+          <a:solidFill>
+            <a:srgbClr val="14B8A6"/>
+          </a:solidFill>
+          <a:ln>
+            <a:noFill/>
+          </a:ln>
+          <a:effectLst/>
+        </p:spPr>
+        <p:style>
+          <a:lnRef idx="1">
+            <a:schemeClr val="accent1"/>
+          </a:lnRef>
+          <a:fillRef idx="3">
+            <a:schemeClr val="accent1"/>
+          </a:fillRef>
+          <a:effectRef idx="2">
+            <a:schemeClr val="accent1"/>
+          </a:effectRef>
+          <a:fontRef idx="minor">
+            <a:schemeClr val="lt1"/>
+          </a:fontRef>
+        </p:style>
+        <p:txBody>
+          <a:bodyPr rtlCol="0" anchor="ctr"/>
+          <a:lstStyle/>
+          <a:p>
+            <a:pPr algn="ctr"/>
+          </a:p>
+        </p:txBody>
+      </p:sp>
+      <p:sp>
+        <p:nvSpPr>
+          <p:cNvPr id="8" name="Rectangle 7"/>
+          <p:cNvSpPr/>
+          <p:nvPr/>
+        </p:nvSpPr>
+        <p:spPr>
+          <a:xfrm>
+            <a:off x="7622438" y="1730959"/>
+            <a:ext cx="1995220" cy="31089"/>
+          </a:xfrm>
+          <a:prstGeom prst="rect">
+            <a:avLst/>
+          </a:prstGeom>
+          <a:solidFill>
+            <a:srgbClr val="14B8A6"/>
+          </a:solidFill>
+          <a:ln>
+            <a:noFill/>
+          </a:ln>
+          <a:effectLst/>
+        </p:spPr>
+        <p:style>
+          <a:lnRef idx="1">
+            <a:schemeClr val="accent1"/>
+          </a:lnRef>
+          <a:fillRef idx="3">
+            <a:schemeClr val="accent1"/>
+          </a:fillRef>
+          <a:effectRef idx="2">
+            <a:schemeClr val="accent1"/>
+          </a:effectRef>
+          <a:fontRef idx="minor">
+            <a:schemeClr val="lt1"/>
+          </a:fontRef>
+        </p:style>
+        <p:txBody>
+          <a:bodyPr rtlCol="0" anchor="ctr"/>
+          <a:lstStyle/>
+          <a:p>
+            <a:pPr algn="ctr"/>
+          </a:p>
+        </p:txBody>
+      </p:sp>
+      <p:sp>
+        <p:nvSpPr>
+          <p:cNvPr id="9" name="Oval 8"/>
+          <p:cNvSpPr/>
+          <p:nvPr/>
+        </p:nvSpPr>
+        <p:spPr>
+          <a:xfrm>
+            <a:off x="2040940" y="1481328"/>
+            <a:ext cx="530352" cy="530352"/>
+          </a:xfrm>
+          <a:prstGeom prst="ellipse">
             <a:avLst/>
           </a:prstGeom>
           <a:solidFill>
@@ -6997,227 +7085,7 @@
       </p:sp>
       <p:sp>
         <p:nvSpPr>
-          <p:cNvPr id="8" name="Rectangle 7"/>
-          <p:cNvSpPr/>
-          <p:nvPr/>
-        </p:nvSpPr>
-        <p:spPr>
-          <a:xfrm>
-            <a:off x="5096865" y="1730959"/>
-            <a:ext cx="1995220" cy="31089"/>
-          </a:xfrm>
-          <a:prstGeom prst="rect">
-            <a:avLst/>
-          </a:prstGeom>
-          <a:solidFill>
-            <a:srgbClr val="14B8A6"/>
-          </a:solidFill>
-          <a:ln>
-            <a:noFill/>
-          </a:ln>
-          <a:effectLst/>
-        </p:spPr>
-        <p:style>
-          <a:lnRef idx="1">
-            <a:schemeClr val="accent1"/>
-          </a:lnRef>
-          <a:fillRef idx="3">
-            <a:schemeClr val="accent1"/>
-          </a:fillRef>
-          <a:effectRef idx="2">
-            <a:schemeClr val="accent1"/>
-          </a:effectRef>
-          <a:fontRef idx="minor">
-            <a:schemeClr val="lt1"/>
-          </a:fontRef>
-        </p:style>
-        <p:txBody>
-          <a:bodyPr rtlCol="0" anchor="ctr"/>
-          <a:lstStyle/>
-          <a:p>
-            <a:pPr algn="ctr"/>
-          </a:p>
-        </p:txBody>
-      </p:sp>
-      <p:sp>
-        <p:nvSpPr>
-          <p:cNvPr id="9" name="Isosceles Triangle 8"/>
-          <p:cNvSpPr/>
-          <p:nvPr/>
-        </p:nvSpPr>
-        <p:spPr>
-          <a:xfrm rot="5400000">
-            <a:off x="6021324" y="1673352"/>
-            <a:ext cx="146304" cy="146304"/>
-          </a:xfrm>
-          <a:prstGeom prst="triangle">
-            <a:avLst/>
-          </a:prstGeom>
-          <a:solidFill>
-            <a:srgbClr val="0D9488"/>
-          </a:solidFill>
-          <a:ln>
-            <a:noFill/>
-          </a:ln>
-          <a:effectLst/>
-        </p:spPr>
-        <p:style>
-          <a:lnRef idx="1">
-            <a:schemeClr val="accent1"/>
-          </a:lnRef>
-          <a:fillRef idx="3">
-            <a:schemeClr val="accent1"/>
-          </a:fillRef>
-          <a:effectRef idx="2">
-            <a:schemeClr val="accent1"/>
-          </a:effectRef>
-          <a:fontRef idx="minor">
-            <a:schemeClr val="lt1"/>
-          </a:fontRef>
-        </p:style>
-        <p:txBody>
-          <a:bodyPr rtlCol="0" anchor="ctr"/>
-          <a:lstStyle/>
-          <a:p>
-            <a:pPr algn="ctr"/>
-          </a:p>
-        </p:txBody>
-      </p:sp>
-      <p:sp>
-        <p:nvSpPr>
-          <p:cNvPr id="10" name="Rectangle 9"/>
-          <p:cNvSpPr/>
-          <p:nvPr/>
-        </p:nvSpPr>
-        <p:spPr>
-          <a:xfrm>
-            <a:off x="7622438" y="1730959"/>
-            <a:ext cx="1995220" cy="31089"/>
-          </a:xfrm>
-          <a:prstGeom prst="rect">
-            <a:avLst/>
-          </a:prstGeom>
-          <a:solidFill>
-            <a:srgbClr val="14B8A6"/>
-          </a:solidFill>
-          <a:ln>
-            <a:noFill/>
-          </a:ln>
-          <a:effectLst/>
-        </p:spPr>
-        <p:style>
-          <a:lnRef idx="1">
-            <a:schemeClr val="accent1"/>
-          </a:lnRef>
-          <a:fillRef idx="3">
-            <a:schemeClr val="accent1"/>
-          </a:fillRef>
-          <a:effectRef idx="2">
-            <a:schemeClr val="accent1"/>
-          </a:effectRef>
-          <a:fontRef idx="minor">
-            <a:schemeClr val="lt1"/>
-          </a:fontRef>
-        </p:style>
-        <p:txBody>
-          <a:bodyPr rtlCol="0" anchor="ctr"/>
-          <a:lstStyle/>
-          <a:p>
-            <a:pPr algn="ctr"/>
-          </a:p>
-        </p:txBody>
-      </p:sp>
-      <p:sp>
-        <p:nvSpPr>
-          <p:cNvPr id="11" name="Isosceles Triangle 10"/>
-          <p:cNvSpPr/>
-          <p:nvPr/>
-        </p:nvSpPr>
-        <p:spPr>
-          <a:xfrm rot="5400000">
-            <a:off x="8546896" y="1673352"/>
-            <a:ext cx="146304" cy="146304"/>
-          </a:xfrm>
-          <a:prstGeom prst="triangle">
-            <a:avLst/>
-          </a:prstGeom>
-          <a:solidFill>
-            <a:srgbClr val="0D9488"/>
-          </a:solidFill>
-          <a:ln>
-            <a:noFill/>
-          </a:ln>
-          <a:effectLst/>
-        </p:spPr>
-        <p:style>
-          <a:lnRef idx="1">
-            <a:schemeClr val="accent1"/>
-          </a:lnRef>
-          <a:fillRef idx="3">
-            <a:schemeClr val="accent1"/>
-          </a:fillRef>
-          <a:effectRef idx="2">
-            <a:schemeClr val="accent1"/>
-          </a:effectRef>
-          <a:fontRef idx="minor">
-            <a:schemeClr val="lt1"/>
-          </a:fontRef>
-        </p:style>
-        <p:txBody>
-          <a:bodyPr rtlCol="0" anchor="ctr"/>
-          <a:lstStyle/>
-          <a:p>
-            <a:pPr algn="ctr"/>
-          </a:p>
-        </p:txBody>
-      </p:sp>
-      <p:sp>
-        <p:nvSpPr>
-          <p:cNvPr id="12" name="Oval 11"/>
-          <p:cNvSpPr/>
-          <p:nvPr/>
-        </p:nvSpPr>
-        <p:spPr>
-          <a:xfrm>
-            <a:off x="2040940" y="1481328"/>
-            <a:ext cx="530352" cy="530352"/>
-          </a:xfrm>
-          <a:prstGeom prst="ellipse">
-            <a:avLst/>
-          </a:prstGeom>
-          <a:solidFill>
-            <a:srgbClr val="0D9488"/>
-          </a:solidFill>
-          <a:ln>
-            <a:noFill/>
-          </a:ln>
-          <a:effectLst/>
-        </p:spPr>
-        <p:style>
-          <a:lnRef idx="1">
-            <a:schemeClr val="accent1"/>
-          </a:lnRef>
-          <a:fillRef idx="3">
-            <a:schemeClr val="accent1"/>
-          </a:fillRef>
-          <a:effectRef idx="2">
-            <a:schemeClr val="accent1"/>
-          </a:effectRef>
-          <a:fontRef idx="minor">
-            <a:schemeClr val="lt1"/>
-          </a:fontRef>
-        </p:style>
-        <p:txBody>
-          <a:bodyPr rtlCol="0" anchor="ctr"/>
-          <a:lstStyle/>
-          <a:p>
-            <a:pPr algn="ctr"/>
-          </a:p>
-        </p:txBody>
-      </p:sp>
-      <p:sp>
-        <p:nvSpPr>
-          <p:cNvPr id="13" name="TextBox 12"/>
+          <p:cNvPr id="10" name="TextBox 9"/>
           <p:cNvSpPr txBox="1"/>
           <p:nvPr/>
         </p:nvSpPr>
@@ -7252,7 +7120,7 @@
       </p:sp>
       <p:sp>
         <p:nvSpPr>
-          <p:cNvPr id="14" name="Rounded Rectangle 13"/>
+          <p:cNvPr id="11" name="Rounded Rectangle 10"/>
           <p:cNvSpPr/>
           <p:nvPr/>
         </p:nvSpPr>
@@ -7300,7 +7168,7 @@
       </p:sp>
       <p:sp>
         <p:nvSpPr>
-          <p:cNvPr id="15" name="TextBox 14"/>
+          <p:cNvPr id="12" name="TextBox 11"/>
           <p:cNvSpPr txBox="1"/>
           <p:nvPr/>
         </p:nvSpPr>
@@ -7335,7 +7203,7 @@
       </p:sp>
       <p:sp>
         <p:nvSpPr>
-          <p:cNvPr id="16" name="TextBox 15"/>
+          <p:cNvPr id="13" name="TextBox 12"/>
           <p:cNvSpPr txBox="1"/>
           <p:nvPr/>
         </p:nvSpPr>
@@ -7374,7 +7242,7 @@
       </p:sp>
       <p:sp>
         <p:nvSpPr>
-          <p:cNvPr id="17" name="Oval 16"/>
+          <p:cNvPr id="14" name="Oval 13"/>
           <p:cNvSpPr/>
           <p:nvPr/>
         </p:nvSpPr>
@@ -7418,7 +7286,7 @@
       </p:sp>
       <p:sp>
         <p:nvSpPr>
-          <p:cNvPr id="18" name="TextBox 17"/>
+          <p:cNvPr id="15" name="TextBox 14"/>
           <p:cNvSpPr txBox="1"/>
           <p:nvPr/>
         </p:nvSpPr>
@@ -7453,7 +7321,7 @@
       </p:sp>
       <p:sp>
         <p:nvSpPr>
-          <p:cNvPr id="19" name="Rounded Rectangle 18"/>
+          <p:cNvPr id="16" name="Rounded Rectangle 15"/>
           <p:cNvSpPr/>
           <p:nvPr/>
         </p:nvSpPr>
@@ -7501,7 +7369,7 @@
       </p:sp>
       <p:sp>
         <p:nvSpPr>
-          <p:cNvPr id="20" name="TextBox 19"/>
+          <p:cNvPr id="17" name="TextBox 16"/>
           <p:cNvSpPr txBox="1"/>
           <p:nvPr/>
         </p:nvSpPr>
@@ -7536,7 +7404,7 @@
       </p:sp>
       <p:sp>
         <p:nvSpPr>
-          <p:cNvPr id="21" name="TextBox 20"/>
+          <p:cNvPr id="18" name="TextBox 17"/>
           <p:cNvSpPr txBox="1"/>
           <p:nvPr/>
         </p:nvSpPr>
@@ -7575,7 +7443,7 @@
       </p:sp>
       <p:sp>
         <p:nvSpPr>
-          <p:cNvPr id="22" name="Oval 21"/>
+          <p:cNvPr id="19" name="Oval 18"/>
           <p:cNvSpPr/>
           <p:nvPr/>
         </p:nvSpPr>
@@ -7619,7 +7487,7 @@
       </p:sp>
       <p:sp>
         <p:nvSpPr>
-          <p:cNvPr id="23" name="TextBox 22"/>
+          <p:cNvPr id="20" name="TextBox 19"/>
           <p:cNvSpPr txBox="1"/>
           <p:nvPr/>
         </p:nvSpPr>
@@ -7654,7 +7522,7 @@
       </p:sp>
       <p:sp>
         <p:nvSpPr>
-          <p:cNvPr id="24" name="Rounded Rectangle 23"/>
+          <p:cNvPr id="21" name="Rounded Rectangle 20"/>
           <p:cNvSpPr/>
           <p:nvPr/>
         </p:nvSpPr>
@@ -7702,7 +7570,7 @@
       </p:sp>
       <p:sp>
         <p:nvSpPr>
-          <p:cNvPr id="25" name="TextBox 24"/>
+          <p:cNvPr id="22" name="TextBox 21"/>
           <p:cNvSpPr txBox="1"/>
           <p:nvPr/>
         </p:nvSpPr>
@@ -7737,7 +7605,7 @@
       </p:sp>
       <p:sp>
         <p:nvSpPr>
-          <p:cNvPr id="26" name="TextBox 25"/>
+          <p:cNvPr id="23" name="TextBox 22"/>
           <p:cNvSpPr txBox="1"/>
           <p:nvPr/>
         </p:nvSpPr>
@@ -7776,7 +7644,7 @@
       </p:sp>
       <p:sp>
         <p:nvSpPr>
-          <p:cNvPr id="27" name="Oval 26"/>
+          <p:cNvPr id="24" name="Oval 23"/>
           <p:cNvSpPr/>
           <p:nvPr/>
         </p:nvSpPr>
@@ -7820,7 +7688,7 @@
       </p:sp>
       <p:sp>
         <p:nvSpPr>
-          <p:cNvPr id="28" name="TextBox 27"/>
+          <p:cNvPr id="25" name="TextBox 24"/>
           <p:cNvSpPr txBox="1"/>
           <p:nvPr/>
         </p:nvSpPr>
@@ -7855,7 +7723,7 @@
       </p:sp>
       <p:sp>
         <p:nvSpPr>
-          <p:cNvPr id="29" name="Rounded Rectangle 28"/>
+          <p:cNvPr id="26" name="Rounded Rectangle 25"/>
           <p:cNvSpPr/>
           <p:nvPr/>
         </p:nvSpPr>
@@ -7903,7 +7771,7 @@
       </p:sp>
       <p:sp>
         <p:nvSpPr>
-          <p:cNvPr id="30" name="TextBox 29"/>
+          <p:cNvPr id="27" name="TextBox 26"/>
           <p:cNvSpPr txBox="1"/>
           <p:nvPr/>
         </p:nvSpPr>
@@ -7938,7 +7806,7 @@
       </p:sp>
       <p:sp>
         <p:nvSpPr>
-          <p:cNvPr id="31" name="TextBox 30"/>
+          <p:cNvPr id="28" name="TextBox 27"/>
           <p:cNvSpPr txBox="1"/>
           <p:nvPr/>
         </p:nvSpPr>
@@ -7977,7 +7845,7 @@
       </p:sp>
       <p:sp>
         <p:nvSpPr>
-          <p:cNvPr id="32" name="TextBox 31"/>
+          <p:cNvPr id="29" name="TextBox 28"/>
           <p:cNvSpPr txBox="1"/>
           <p:nvPr/>
         </p:nvSpPr>
@@ -8012,7 +7880,7 @@
       </p:sp>
       <p:sp>
         <p:nvSpPr>
-          <p:cNvPr id="33" name="TextBox 32"/>
+          <p:cNvPr id="30" name="TextBox 29"/>
           <p:cNvSpPr txBox="1"/>
           <p:nvPr/>
         </p:nvSpPr>
@@ -8047,7 +7915,7 @@
       </p:sp>
       <p:sp>
         <p:nvSpPr>
-          <p:cNvPr id="34" name="Rectangle 33"/>
+          <p:cNvPr id="31" name="Rectangle 30"/>
           <p:cNvSpPr/>
           <p:nvPr/>
         </p:nvSpPr>
@@ -8571,7 +8439,7 @@
           <a:p>
             <a:pPr>
               <a:lnSpc>
-                <a:spcPct val="115000"/>
+                <a:spcPct val="149500"/>
               </a:lnSpc>
             </a:pPr>
             <a:r>
@@ -8596,7 +8464,7 @@
           <a:p>
             <a:pPr>
               <a:lnSpc>
-                <a:spcPct val="115000"/>
+                <a:spcPct val="149500"/>
               </a:lnSpc>
             </a:pPr>
             <a:r>
@@ -8621,7 +8489,7 @@
           <a:p>
             <a:pPr>
               <a:lnSpc>
-                <a:spcPct val="115000"/>
+                <a:spcPct val="149500"/>
               </a:lnSpc>
             </a:pPr>
             <a:r>
@@ -9126,7 +8994,7 @@
           <a:p>
             <a:pPr>
               <a:lnSpc>
-                <a:spcPct val="115000"/>
+                <a:spcPct val="149500"/>
               </a:lnSpc>
             </a:pPr>
             <a:r>
@@ -9151,7 +9019,7 @@
           <a:p>
             <a:pPr>
               <a:lnSpc>
-                <a:spcPct val="115000"/>
+                <a:spcPct val="149500"/>
               </a:lnSpc>
             </a:pPr>
             <a:r>
@@ -9176,7 +9044,7 @@
           <a:p>
             <a:pPr>
               <a:lnSpc>
-                <a:spcPct val="115000"/>
+                <a:spcPct val="149500"/>
               </a:lnSpc>
             </a:pPr>
             <a:r>
@@ -9796,7 +9664,7 @@
           <a:p>
             <a:pPr>
               <a:lnSpc>
-                <a:spcPct val="115000"/>
+                <a:spcPct val="149500"/>
               </a:lnSpc>
             </a:pPr>
             <a:r>
@@ -9821,7 +9689,7 @@
           <a:p>
             <a:pPr>
               <a:lnSpc>
-                <a:spcPct val="115000"/>
+                <a:spcPct val="149500"/>
               </a:lnSpc>
             </a:pPr>
             <a:r>
@@ -9846,7 +9714,7 @@
           <a:p>
             <a:pPr>
               <a:lnSpc>
-                <a:spcPct val="115000"/>
+                <a:spcPct val="149500"/>
               </a:lnSpc>
             </a:pPr>
             <a:r>
@@ -9871,7 +9739,7 @@
           <a:p>
             <a:pPr>
               <a:lnSpc>
-                <a:spcPct val="115000"/>
+                <a:spcPct val="149500"/>
               </a:lnSpc>
             </a:pPr>
             <a:r>
@@ -10534,7 +10402,7 @@
           <a:p>
             <a:pPr>
               <a:lnSpc>
-                <a:spcPct val="115000"/>
+                <a:spcPct val="149500"/>
               </a:lnSpc>
             </a:pPr>
             <a:r>
@@ -10559,7 +10427,7 @@
           <a:p>
             <a:pPr>
               <a:lnSpc>
-                <a:spcPct val="115000"/>
+                <a:spcPct val="149500"/>
               </a:lnSpc>
             </a:pPr>
             <a:r>
@@ -10584,7 +10452,7 @@
           <a:p>
             <a:pPr>
               <a:lnSpc>
-                <a:spcPct val="115000"/>
+                <a:spcPct val="149500"/>
               </a:lnSpc>
             </a:pPr>
             <a:r>

--- a/class/cloud_infra_mgmt/11주차_Jenkins_CICD기초/01_강의자료/1차시_CICD개념과Jenkins아키텍처.pptx
+++ b/class/cloud_infra_mgmt/11주차_Jenkins_CICD기초/01_강의자료/1차시_CICD개념과Jenkins아키텍처.pptx
@@ -4849,6 +4849,8 @@
                   <a:srgbClr val="14B8A6"/>
                 </a:solidFill>
                 <a:latin typeface="맑은 고딕"/>
+                <a:ea typeface="맑은 고딕"/>
+                <a:cs typeface="맑은 고딕"/>
               </a:rPr>
               <a:t>클라우드인프라관리  ·  11주차 1차시</a:t>
             </a:r>
@@ -4884,6 +4886,8 @@
                   <a:srgbClr val="FFFFFF"/>
                 </a:solidFill>
                 <a:latin typeface="맑은 고딕"/>
+                <a:ea typeface="맑은 고딕"/>
+                <a:cs typeface="맑은 고딕"/>
               </a:rPr>
               <a:t>CI/CD 개념과 Jenkins 아키텍처</a:t>
             </a:r>
@@ -4919,6 +4923,8 @@
                   <a:srgbClr val="C9D3E6"/>
                 </a:solidFill>
                 <a:latin typeface="맑은 고딕"/>
+                <a:ea typeface="맑은 고딕"/>
+                <a:cs typeface="맑은 고딕"/>
               </a:rPr>
               <a:t>빌드와 배포를 자동화한다는 것</a:t>
             </a:r>
@@ -4954,6 +4960,8 @@
                   <a:srgbClr val="FFFFFF"/>
                 </a:solidFill>
                 <a:latin typeface="맑은 고딕"/>
+                <a:ea typeface="맑은 고딕"/>
+                <a:cs typeface="맑은 고딕"/>
               </a:rPr>
               <a:t>영남이공대학교 김지윤교수</a:t>
             </a:r>
@@ -5113,6 +5121,8 @@
                   <a:srgbClr val="14213D"/>
                 </a:solidFill>
                 <a:latin typeface="맑은 고딕"/>
+                <a:ea typeface="맑은 고딕"/>
+                <a:cs typeface="맑은 고딕"/>
               </a:rPr>
               <a:t>03</a:t>
             </a:r>
@@ -5148,6 +5158,8 @@
                   <a:srgbClr val="14B8A6"/>
                 </a:solidFill>
                 <a:latin typeface="맑은 고딕"/>
+                <a:ea typeface="맑은 고딕"/>
+                <a:cs typeface="맑은 고딕"/>
               </a:rPr>
               <a:t>실습 안내</a:t>
             </a:r>
@@ -5183,6 +5195,8 @@
                   <a:srgbClr val="FFFFFF"/>
                 </a:solidFill>
                 <a:latin typeface="맑은 고딕"/>
+                <a:ea typeface="맑은 고딕"/>
+                <a:cs typeface="맑은 고딕"/>
               </a:rPr>
               <a:t>Killercoda — 임시 Jenkins 컨테이너 UI 체험</a:t>
             </a:r>
@@ -5222,6 +5236,8 @@
                   <a:srgbClr val="0D9488"/>
                 </a:solidFill>
                 <a:latin typeface="맑은 고딕"/>
+                <a:ea typeface="맑은 고딕"/>
+                <a:cs typeface="맑은 고딕"/>
               </a:rPr>
               <a:t>●  </a:t>
             </a:r>
@@ -5231,6 +5247,8 @@
                   <a:srgbClr val="222733"/>
                 </a:solidFill>
                 <a:latin typeface="맑은 고딕"/>
+                <a:ea typeface="맑은 고딕"/>
+                <a:cs typeface="맑은 고딕"/>
               </a:rPr>
               <a:t>docker run으로 임시 Jenkins 컨테이너를 띄우고 웹 콘솔 접속</a:t>
             </a:r>
@@ -5247,6 +5265,8 @@
                   <a:srgbClr val="0D9488"/>
                 </a:solidFill>
                 <a:latin typeface="맑은 고딕"/>
+                <a:ea typeface="맑은 고딕"/>
+                <a:cs typeface="맑은 고딕"/>
               </a:rPr>
               <a:t>●  </a:t>
             </a:r>
@@ -5256,6 +5276,8 @@
                   <a:srgbClr val="222733"/>
                 </a:solidFill>
                 <a:latin typeface="맑은 고딕"/>
+                <a:ea typeface="맑은 고딕"/>
+                <a:cs typeface="맑은 고딕"/>
               </a:rPr>
               <a:t>대시보드, Job 생성 화면, Build 이력 화면 등 기본 메뉴 구조 둘러보기</a:t>
             </a:r>
@@ -5272,6 +5294,8 @@
                   <a:srgbClr val="0D9488"/>
                 </a:solidFill>
                 <a:latin typeface="맑은 고딕"/>
+                <a:ea typeface="맑은 고딕"/>
+                <a:cs typeface="맑은 고딕"/>
               </a:rPr>
               <a:t>●  </a:t>
             </a:r>
@@ -5281,6 +5305,8 @@
                   <a:srgbClr val="222733"/>
                 </a:solidFill>
                 <a:latin typeface="맑은 고딕"/>
+                <a:ea typeface="맑은 고딕"/>
+                <a:cs typeface="맑은 고딕"/>
               </a:rPr>
               <a:t>오늘은 UI에 익숙해지는 것이 목표 — 실제 Job 설정은 다음 차시부터 본격 진행</a:t>
             </a:r>
@@ -5316,6 +5342,8 @@
                   <a:srgbClr val="5B6373"/>
                 </a:solidFill>
                 <a:latin typeface="맑은 고딕"/>
+                <a:ea typeface="맑은 고딕"/>
+                <a:cs typeface="맑은 고딕"/>
               </a:rPr>
               <a:t>클라우드인프라관리  ·  11주차 1차시</a:t>
             </a:r>
@@ -5351,6 +5379,8 @@
                   <a:srgbClr val="5B6373"/>
                 </a:solidFill>
                 <a:latin typeface="맑은 고딕"/>
+                <a:ea typeface="맑은 고딕"/>
+                <a:cs typeface="맑은 고딕"/>
               </a:rPr>
               <a:t>10 / 13</a:t>
             </a:r>
@@ -5554,6 +5584,8 @@
                   <a:srgbClr val="14213D"/>
                 </a:solidFill>
                 <a:latin typeface="맑은 고딕"/>
+                <a:ea typeface="맑은 고딕"/>
+                <a:cs typeface="맑은 고딕"/>
               </a:rPr>
               <a:t>03</a:t>
             </a:r>
@@ -5589,6 +5621,8 @@
                   <a:srgbClr val="14B8A6"/>
                 </a:solidFill>
                 <a:latin typeface="맑은 고딕"/>
+                <a:ea typeface="맑은 고딕"/>
+                <a:cs typeface="맑은 고딕"/>
               </a:rPr>
               <a:t>실습 안내</a:t>
             </a:r>
@@ -5624,6 +5658,8 @@
                   <a:srgbClr val="FFFFFF"/>
                 </a:solidFill>
                 <a:latin typeface="맑은 고딕"/>
+                <a:ea typeface="맑은 고딕"/>
+                <a:cs typeface="맑은 고딕"/>
               </a:rPr>
               <a:t>VM 안내 — 다음 차시 예고</a:t>
             </a:r>
@@ -5663,6 +5699,8 @@
                   <a:srgbClr val="0D9488"/>
                 </a:solidFill>
                 <a:latin typeface="맑은 고딕"/>
+                <a:ea typeface="맑은 고딕"/>
+                <a:cs typeface="맑은 고딕"/>
               </a:rPr>
               <a:t>●  </a:t>
             </a:r>
@@ -5672,6 +5710,8 @@
                   <a:srgbClr val="222733"/>
                 </a:solidFill>
                 <a:latin typeface="맑은 고딕"/>
+                <a:ea typeface="맑은 고딕"/>
+                <a:cs typeface="맑은 고딕"/>
               </a:rPr>
               <a:t>오늘은 개념과 UI 체험 위주였고, 개인 VM에는 아직 Jenkins를 설치하지 않습니다</a:t>
             </a:r>
@@ -5688,6 +5728,8 @@
                   <a:srgbClr val="0D9488"/>
                 </a:solidFill>
                 <a:latin typeface="맑은 고딕"/>
+                <a:ea typeface="맑은 고딕"/>
+                <a:cs typeface="맑은 고딕"/>
               </a:rPr>
               <a:t>●  </a:t>
             </a:r>
@@ -5697,6 +5739,8 @@
                   <a:srgbClr val="222733"/>
                 </a:solidFill>
                 <a:latin typeface="맑은 고딕"/>
+                <a:ea typeface="맑은 고딕"/>
+                <a:cs typeface="맑은 고딕"/>
               </a:rPr>
               <a:t>다음 2차시에 VM에 Docker Compose로 Jenkins를 영구 설치합니다</a:t>
             </a:r>
@@ -5713,6 +5757,8 @@
                   <a:srgbClr val="0D9488"/>
                 </a:solidFill>
                 <a:latin typeface="맑은 고딕"/>
+                <a:ea typeface="맑은 고딕"/>
+                <a:cs typeface="맑은 고딕"/>
               </a:rPr>
               <a:t>●  </a:t>
             </a:r>
@@ -5722,6 +5768,8 @@
                   <a:srgbClr val="222733"/>
                 </a:solidFill>
                 <a:latin typeface="맑은 고딕"/>
+                <a:ea typeface="맑은 고딕"/>
+                <a:cs typeface="맑은 고딕"/>
               </a:rPr>
               <a:t>VM의 디스크 여유 공간을 미리 한 번 확인해두면 좋습니다(df -h)</a:t>
             </a:r>
@@ -5757,6 +5805,8 @@
                   <a:srgbClr val="5B6373"/>
                 </a:solidFill>
                 <a:latin typeface="맑은 고딕"/>
+                <a:ea typeface="맑은 고딕"/>
+                <a:cs typeface="맑은 고딕"/>
               </a:rPr>
               <a:t>클라우드인프라관리  ·  11주차 1차시</a:t>
             </a:r>
@@ -5792,6 +5842,8 @@
                   <a:srgbClr val="5B6373"/>
                 </a:solidFill>
                 <a:latin typeface="맑은 고딕"/>
+                <a:ea typeface="맑은 고딕"/>
+                <a:cs typeface="맑은 고딕"/>
               </a:rPr>
               <a:t>11 / 13</a:t>
             </a:r>
@@ -5977,6 +6029,8 @@
                   <a:srgbClr val="FFFFFF"/>
                 </a:solidFill>
                 <a:latin typeface="맑은 고딕"/>
+                <a:ea typeface="맑은 고딕"/>
+                <a:cs typeface="맑은 고딕"/>
               </a:rPr>
               <a:t>오늘의 정리</a:t>
             </a:r>
@@ -6030,6 +6084,8 @@
                   <a:srgbClr val="14213D"/>
                 </a:solidFill>
                 <a:latin typeface="맑은 고딕"/>
+                <a:ea typeface="맑은 고딕"/>
+                <a:cs typeface="맑은 고딕"/>
               </a:rPr>
               <a:t>1</a:t>
             </a:r>
@@ -6065,6 +6121,8 @@
                   <a:srgbClr val="FFFFFF"/>
                 </a:solidFill>
                 <a:latin typeface="맑은 고딕"/>
+                <a:ea typeface="맑은 고딕"/>
+                <a:cs typeface="맑은 고딕"/>
               </a:rPr>
               <a:t>CI는 코드 변경마다 자동 빌드·테스트, CD는 그 결과물을 자동 배포하는 것이다</a:t>
             </a:r>
@@ -6118,6 +6176,8 @@
                   <a:srgbClr val="14213D"/>
                 </a:solidFill>
                 <a:latin typeface="맑은 고딕"/>
+                <a:ea typeface="맑은 고딕"/>
+                <a:cs typeface="맑은 고딕"/>
               </a:rPr>
               <a:t>2</a:t>
             </a:r>
@@ -6153,6 +6213,8 @@
                   <a:srgbClr val="FFFFFF"/>
                 </a:solidFill>
                 <a:latin typeface="맑은 고딕"/>
+                <a:ea typeface="맑은 고딕"/>
+                <a:cs typeface="맑은 고딕"/>
               </a:rPr>
               <a:t>Jenkins는 Job·Build·Plugin으로 구성된 CI/CD 자동화 서버다</a:t>
             </a:r>
@@ -6294,6 +6356,8 @@
                   <a:srgbClr val="FFFFFF"/>
                 </a:solidFill>
                 <a:latin typeface="맑은 고딕"/>
+                <a:ea typeface="맑은 고딕"/>
+                <a:cs typeface="맑은 고딕"/>
               </a:rPr>
               <a:t>다음 차시 예고</a:t>
             </a:r>
@@ -6329,6 +6393,8 @@
                   <a:srgbClr val="14B8A6"/>
                 </a:solidFill>
                 <a:latin typeface="맑은 고딕"/>
+                <a:ea typeface="맑은 고딕"/>
+                <a:cs typeface="맑은 고딕"/>
               </a:rPr>
               <a:t>다음 차시 예고 — 11주차 2차시</a:t>
             </a:r>
@@ -6364,6 +6430,8 @@
                   <a:srgbClr val="FFFFFF"/>
                 </a:solidFill>
                 <a:latin typeface="맑은 고딕"/>
+                <a:ea typeface="맑은 고딕"/>
+                <a:cs typeface="맑은 고딕"/>
               </a:rPr>
               <a:t>개인 VM에 Docker Compose로 Jenkins를 영구 설치하고, 초기 관리자 비밀번호로 첫 로그인까지 진행합니다.</a:t>
             </a:r>
@@ -6505,6 +6573,8 @@
                   <a:srgbClr val="14B8A6"/>
                 </a:solidFill>
                 <a:latin typeface="맑은 고딕"/>
+                <a:ea typeface="맑은 고딕"/>
+                <a:cs typeface="맑은 고딕"/>
               </a:rPr>
               <a:t>SESSION OVERVIEW</a:t>
             </a:r>
@@ -6540,6 +6610,8 @@
                   <a:srgbClr val="FFFFFF"/>
                 </a:solidFill>
                 <a:latin typeface="맑은 고딕"/>
+                <a:ea typeface="맑은 고딕"/>
+                <a:cs typeface="맑은 고딕"/>
               </a:rPr>
               <a:t>오늘의 학습 목표</a:t>
             </a:r>
@@ -6579,6 +6651,8 @@
                   <a:srgbClr val="222733"/>
                 </a:solidFill>
                 <a:latin typeface="맑은 고딕"/>
+                <a:ea typeface="맑은 고딕"/>
+                <a:cs typeface="맑은 고딕"/>
               </a:rPr>
               <a:t>1.  CI(지속적 통합)와 CD(지속적 배포)가 무엇인지 이해한다</a:t>
             </a:r>
@@ -6595,6 +6669,8 @@
                   <a:srgbClr val="222733"/>
                 </a:solidFill>
                 <a:latin typeface="맑은 고딕"/>
+                <a:ea typeface="맑은 고딕"/>
+                <a:cs typeface="맑은 고딕"/>
               </a:rPr>
               <a:t>2.  CI/CD가 왜 필요한지, 수동 배포의 문제를 통해 이해한다</a:t>
             </a:r>
@@ -6611,6 +6687,8 @@
                   <a:srgbClr val="222733"/>
                 </a:solidFill>
                 <a:latin typeface="맑은 고딕"/>
+                <a:ea typeface="맑은 고딕"/>
+                <a:cs typeface="맑은 고딕"/>
               </a:rPr>
               <a:t>3.  Jenkins의 기본 아키텍처(Job, Build, Plugin)를 이해한다</a:t>
             </a:r>
@@ -6646,6 +6724,8 @@
                   <a:srgbClr val="5B6373"/>
                 </a:solidFill>
                 <a:latin typeface="맑은 고딕"/>
+                <a:ea typeface="맑은 고딕"/>
+                <a:cs typeface="맑은 고딕"/>
               </a:rPr>
               <a:t>클라우드인프라관리  ·  11주차 1차시</a:t>
             </a:r>
@@ -6681,6 +6761,8 @@
                   <a:srgbClr val="5B6373"/>
                 </a:solidFill>
                 <a:latin typeface="맑은 고딕"/>
+                <a:ea typeface="맑은 고딕"/>
+                <a:cs typeface="맑은 고딕"/>
               </a:rPr>
               <a:t>02 / 13</a:t>
             </a:r>
@@ -6866,6 +6948,8 @@
                   <a:srgbClr val="14B8A6"/>
                 </a:solidFill>
                 <a:latin typeface="맑은 고딕"/>
+                <a:ea typeface="맑은 고딕"/>
+                <a:cs typeface="맑은 고딕"/>
               </a:rPr>
               <a:t>SESSION OVERVIEW</a:t>
             </a:r>
@@ -6901,6 +6985,8 @@
                   <a:srgbClr val="FFFFFF"/>
                 </a:solidFill>
                 <a:latin typeface="맑은 고딕"/>
+                <a:ea typeface="맑은 고딕"/>
+                <a:cs typeface="맑은 고딕"/>
               </a:rPr>
               <a:t>오늘의 진행 순서</a:t>
             </a:r>
@@ -7112,6 +7198,8 @@
                   <a:srgbClr val="FFFFFF"/>
                 </a:solidFill>
                 <a:latin typeface="맑은 고딕"/>
+                <a:ea typeface="맑은 고딕"/>
+                <a:cs typeface="맑은 고딕"/>
               </a:rPr>
               <a:t>1</a:t>
             </a:r>
@@ -7195,6 +7283,8 @@
                   <a:srgbClr val="14213D"/>
                 </a:solidFill>
                 <a:latin typeface="맑은 고딕"/>
+                <a:ea typeface="맑은 고딕"/>
+                <a:cs typeface="맑은 고딕"/>
               </a:rPr>
               <a:t>개념 설명</a:t>
             </a:r>
@@ -7234,6 +7324,8 @@
                   <a:srgbClr val="222733"/>
                 </a:solidFill>
                 <a:latin typeface="맑은 고딕"/>
+                <a:ea typeface="맑은 고딕"/>
+                <a:cs typeface="맑은 고딕"/>
               </a:rPr>
               <a:t>강의자료 기반 직접 강의</a:t>
             </a:r>
@@ -7313,6 +7405,8 @@
                   <a:srgbClr val="FFFFFF"/>
                 </a:solidFill>
                 <a:latin typeface="맑은 고딕"/>
+                <a:ea typeface="맑은 고딕"/>
+                <a:cs typeface="맑은 고딕"/>
               </a:rPr>
               <a:t>2</a:t>
             </a:r>
@@ -7396,6 +7490,8 @@
                   <a:srgbClr val="14213D"/>
                 </a:solidFill>
                 <a:latin typeface="맑은 고딕"/>
+                <a:ea typeface="맑은 고딕"/>
+                <a:cs typeface="맑은 고딕"/>
               </a:rPr>
               <a:t>Killercoda</a:t>
             </a:r>
@@ -7435,6 +7531,8 @@
                   <a:srgbClr val="222733"/>
                 </a:solidFill>
                 <a:latin typeface="맑은 고딕"/>
+                <a:ea typeface="맑은 고딕"/>
+                <a:cs typeface="맑은 고딕"/>
               </a:rPr>
               <a:t>임시 Jenkins 컨테이너 UI 체험</a:t>
             </a:r>
@@ -7514,6 +7612,8 @@
                   <a:srgbClr val="FFFFFF"/>
                 </a:solidFill>
                 <a:latin typeface="맑은 고딕"/>
+                <a:ea typeface="맑은 고딕"/>
+                <a:cs typeface="맑은 고딕"/>
               </a:rPr>
               <a:t>3</a:t>
             </a:r>
@@ -7597,6 +7697,8 @@
                   <a:srgbClr val="14213D"/>
                 </a:solidFill>
                 <a:latin typeface="맑은 고딕"/>
+                <a:ea typeface="맑은 고딕"/>
+                <a:cs typeface="맑은 고딕"/>
               </a:rPr>
               <a:t>VM 안내</a:t>
             </a:r>
@@ -7636,6 +7738,8 @@
                   <a:srgbClr val="222733"/>
                 </a:solidFill>
                 <a:latin typeface="맑은 고딕"/>
+                <a:ea typeface="맑은 고딕"/>
+                <a:cs typeface="맑은 고딕"/>
               </a:rPr>
               <a:t>다음 차시 설치 예고</a:t>
             </a:r>
@@ -7715,6 +7819,8 @@
                   <a:srgbClr val="FFFFFF"/>
                 </a:solidFill>
                 <a:latin typeface="맑은 고딕"/>
+                <a:ea typeface="맑은 고딕"/>
+                <a:cs typeface="맑은 고딕"/>
               </a:rPr>
               <a:t>4</a:t>
             </a:r>
@@ -7798,6 +7904,8 @@
                   <a:srgbClr val="14213D"/>
                 </a:solidFill>
                 <a:latin typeface="맑은 고딕"/>
+                <a:ea typeface="맑은 고딕"/>
+                <a:cs typeface="맑은 고딕"/>
               </a:rPr>
               <a:t>결과 제출</a:t>
             </a:r>
@@ -7837,6 +7945,8 @@
                   <a:srgbClr val="222733"/>
                 </a:solidFill>
                 <a:latin typeface="맑은 고딕"/>
+                <a:ea typeface="맑은 고딕"/>
+                <a:cs typeface="맑은 고딕"/>
               </a:rPr>
               <a:t>체크리스트 제출</a:t>
             </a:r>
@@ -7872,6 +7982,8 @@
                   <a:srgbClr val="5B6373"/>
                 </a:solidFill>
                 <a:latin typeface="맑은 고딕"/>
+                <a:ea typeface="맑은 고딕"/>
+                <a:cs typeface="맑은 고딕"/>
               </a:rPr>
               <a:t>클라우드인프라관리  ·  11주차 1차시</a:t>
             </a:r>
@@ -7907,6 +8019,8 @@
                   <a:srgbClr val="5B6373"/>
                 </a:solidFill>
                 <a:latin typeface="맑은 고딕"/>
+                <a:ea typeface="맑은 고딕"/>
+                <a:cs typeface="맑은 고딕"/>
               </a:rPr>
               <a:t>03 / 13</a:t>
             </a:r>
@@ -8110,6 +8224,8 @@
                   <a:srgbClr val="14213D"/>
                 </a:solidFill>
                 <a:latin typeface="맑은 고딕"/>
+                <a:ea typeface="맑은 고딕"/>
+                <a:cs typeface="맑은 고딕"/>
               </a:rPr>
               <a:t>PART 01</a:t>
             </a:r>
@@ -8145,6 +8261,8 @@
                   <a:srgbClr val="FFFFFF"/>
                 </a:solidFill>
                 <a:latin typeface="맑은 고딕"/>
+                <a:ea typeface="맑은 고딕"/>
+                <a:cs typeface="맑은 고딕"/>
               </a:rPr>
               <a:t>CI/CD란 무엇인가</a:t>
             </a:r>
@@ -8180,6 +8298,8 @@
                   <a:srgbClr val="C9D3E6"/>
                 </a:solidFill>
                 <a:latin typeface="맑은 고딕"/>
+                <a:ea typeface="맑은 고딕"/>
+                <a:cs typeface="맑은 고딕"/>
               </a:rPr>
               <a:t>수동 배포의 문제에서 출발한다</a:t>
             </a:r>
@@ -8339,6 +8459,8 @@
                   <a:srgbClr val="14213D"/>
                 </a:solidFill>
                 <a:latin typeface="맑은 고딕"/>
+                <a:ea typeface="맑은 고딕"/>
+                <a:cs typeface="맑은 고딕"/>
               </a:rPr>
               <a:t>01</a:t>
             </a:r>
@@ -8374,6 +8496,8 @@
                   <a:srgbClr val="14B8A6"/>
                 </a:solidFill>
                 <a:latin typeface="맑은 고딕"/>
+                <a:ea typeface="맑은 고딕"/>
+                <a:cs typeface="맑은 고딕"/>
               </a:rPr>
               <a:t>PART 1 · CI/CD 개념</a:t>
             </a:r>
@@ -8409,6 +8533,8 @@
                   <a:srgbClr val="FFFFFF"/>
                 </a:solidFill>
                 <a:latin typeface="맑은 고딕"/>
+                <a:ea typeface="맑은 고딕"/>
+                <a:cs typeface="맑은 고딕"/>
               </a:rPr>
               <a:t>지금까지 우리는 배포를 손으로 했다</a:t>
             </a:r>
@@ -8448,6 +8574,8 @@
                   <a:srgbClr val="0D9488"/>
                 </a:solidFill>
                 <a:latin typeface="맑은 고딕"/>
+                <a:ea typeface="맑은 고딕"/>
+                <a:cs typeface="맑은 고딕"/>
               </a:rPr>
               <a:t>●  </a:t>
             </a:r>
@@ -8457,6 +8585,8 @@
                   <a:srgbClr val="222733"/>
                 </a:solidFill>
                 <a:latin typeface="맑은 고딕"/>
+                <a:ea typeface="맑은 고딕"/>
+                <a:cs typeface="맑은 고딕"/>
               </a:rPr>
               <a:t>3주차 Docker Hub push, 13주차 이전까지는 코드 수정 → 빌드 → 배포를 전부 손으로 실행</a:t>
             </a:r>
@@ -8473,6 +8603,8 @@
                   <a:srgbClr val="0D9488"/>
                 </a:solidFill>
                 <a:latin typeface="맑은 고딕"/>
+                <a:ea typeface="맑은 고딕"/>
+                <a:cs typeface="맑은 고딕"/>
               </a:rPr>
               <a:t>●  </a:t>
             </a:r>
@@ -8482,6 +8614,8 @@
                   <a:srgbClr val="222733"/>
                 </a:solidFill>
                 <a:latin typeface="맑은 고딕"/>
+                <a:ea typeface="맑은 고딕"/>
+                <a:cs typeface="맑은 고딕"/>
               </a:rPr>
               <a:t>코드를 고칠 때마다 build, push, 재배포 명령어를 매번 다시 입력해야 함</a:t>
             </a:r>
@@ -8498,6 +8632,8 @@
                   <a:srgbClr val="0D9488"/>
                 </a:solidFill>
                 <a:latin typeface="맑은 고딕"/>
+                <a:ea typeface="맑은 고딕"/>
+                <a:cs typeface="맑은 고딕"/>
               </a:rPr>
               <a:t>●  </a:t>
             </a:r>
@@ -8507,6 +8643,8 @@
                   <a:srgbClr val="222733"/>
                 </a:solidFill>
                 <a:latin typeface="맑은 고딕"/>
+                <a:ea typeface="맑은 고딕"/>
+                <a:cs typeface="맑은 고딕"/>
               </a:rPr>
               <a:t>여러 사람이 협업하면, 누가 언제 무엇을 배포했는지 추적하기도 어려움</a:t>
             </a:r>
@@ -8586,6 +8724,8 @@
                   <a:srgbClr val="FFFFFF"/>
                 </a:solidFill>
                 <a:latin typeface="맑은 고딕"/>
+                <a:ea typeface="맑은 고딕"/>
+                <a:cs typeface="맑은 고딕"/>
               </a:rPr>
               <a:t>💡  CI/CD</a:t>
             </a:r>
@@ -8621,6 +8761,8 @@
                   <a:srgbClr val="FFFFFF"/>
                 </a:solidFill>
                 <a:latin typeface="맑은 고딕"/>
+                <a:ea typeface="맑은 고딕"/>
+                <a:cs typeface="맑은 고딕"/>
               </a:rPr>
               <a:t>CI(Continuous Integration, 지속적 통합) + CD(Continuous Deployment, 지속적 배포)</a:t>
             </a:r>
@@ -8656,6 +8798,8 @@
                   <a:srgbClr val="5B6373"/>
                 </a:solidFill>
                 <a:latin typeface="맑은 고딕"/>
+                <a:ea typeface="맑은 고딕"/>
+                <a:cs typeface="맑은 고딕"/>
               </a:rPr>
               <a:t>클라우드인프라관리  ·  11주차 1차시</a:t>
             </a:r>
@@ -8691,6 +8835,8 @@
                   <a:srgbClr val="5B6373"/>
                 </a:solidFill>
                 <a:latin typeface="맑은 고딕"/>
+                <a:ea typeface="맑은 고딕"/>
+                <a:cs typeface="맑은 고딕"/>
               </a:rPr>
               <a:t>05 / 13</a:t>
             </a:r>
@@ -8894,6 +9040,8 @@
                   <a:srgbClr val="14213D"/>
                 </a:solidFill>
                 <a:latin typeface="맑은 고딕"/>
+                <a:ea typeface="맑은 고딕"/>
+                <a:cs typeface="맑은 고딕"/>
               </a:rPr>
               <a:t>01</a:t>
             </a:r>
@@ -8929,6 +9077,8 @@
                   <a:srgbClr val="14B8A6"/>
                 </a:solidFill>
                 <a:latin typeface="맑은 고딕"/>
+                <a:ea typeface="맑은 고딕"/>
+                <a:cs typeface="맑은 고딕"/>
               </a:rPr>
               <a:t>PART 1 · CI/CD 개념</a:t>
             </a:r>
@@ -8964,6 +9114,8 @@
                   <a:srgbClr val="FFFFFF"/>
                 </a:solidFill>
                 <a:latin typeface="맑은 고딕"/>
+                <a:ea typeface="맑은 고딕"/>
+                <a:cs typeface="맑은 고딕"/>
               </a:rPr>
               <a:t>CI와 CD를 나눠서 이해하기</a:t>
             </a:r>
@@ -9003,6 +9155,8 @@
                   <a:srgbClr val="0D9488"/>
                 </a:solidFill>
                 <a:latin typeface="맑은 고딕"/>
+                <a:ea typeface="맑은 고딕"/>
+                <a:cs typeface="맑은 고딕"/>
               </a:rPr>
               <a:t>●  </a:t>
             </a:r>
@@ -9012,6 +9166,8 @@
                   <a:srgbClr val="222733"/>
                 </a:solidFill>
                 <a:latin typeface="맑은 고딕"/>
+                <a:ea typeface="맑은 고딕"/>
+                <a:cs typeface="맑은 고딕"/>
               </a:rPr>
               <a:t>CI(지속적 통합) — 코드가 바뀔 때마다 자동으로 빌드하고 테스트해서, 문제를 빨리 발견</a:t>
             </a:r>
@@ -9028,6 +9184,8 @@
                   <a:srgbClr val="0D9488"/>
                 </a:solidFill>
                 <a:latin typeface="맑은 고딕"/>
+                <a:ea typeface="맑은 고딕"/>
+                <a:cs typeface="맑은 고딕"/>
               </a:rPr>
               <a:t>●  </a:t>
             </a:r>
@@ -9037,6 +9195,8 @@
                   <a:srgbClr val="222733"/>
                 </a:solidFill>
                 <a:latin typeface="맑은 고딕"/>
+                <a:ea typeface="맑은 고딕"/>
+                <a:cs typeface="맑은 고딕"/>
               </a:rPr>
               <a:t>CD(지속적 배포) — 빌드된 결과물을 자동으로 실제 서비스 환경까지 배포</a:t>
             </a:r>
@@ -9053,6 +9213,8 @@
                   <a:srgbClr val="0D9488"/>
                 </a:solidFill>
                 <a:latin typeface="맑은 고딕"/>
+                <a:ea typeface="맑은 고딕"/>
+                <a:cs typeface="맑은 고딕"/>
               </a:rPr>
               <a:t>●  </a:t>
             </a:r>
@@ -9062,6 +9224,8 @@
                   <a:srgbClr val="222733"/>
                 </a:solidFill>
                 <a:latin typeface="맑은 고딕"/>
+                <a:ea typeface="맑은 고딕"/>
+                <a:cs typeface="맑은 고딕"/>
               </a:rPr>
               <a:t>이 둘을 자동으로 이어주는 파이프라인을 만드는 게 CI/CD 도구의 역할</a:t>
             </a:r>
@@ -9097,6 +9261,8 @@
                   <a:srgbClr val="5B6373"/>
                 </a:solidFill>
                 <a:latin typeface="맑은 고딕"/>
+                <a:ea typeface="맑은 고딕"/>
+                <a:cs typeface="맑은 고딕"/>
               </a:rPr>
               <a:t>클라우드인프라관리  ·  11주차 1차시</a:t>
             </a:r>
@@ -9132,6 +9298,8 @@
                   <a:srgbClr val="5B6373"/>
                 </a:solidFill>
                 <a:latin typeface="맑은 고딕"/>
+                <a:ea typeface="맑은 고딕"/>
+                <a:cs typeface="맑은 고딕"/>
               </a:rPr>
               <a:t>06 / 13</a:t>
             </a:r>
@@ -9335,6 +9503,8 @@
                   <a:srgbClr val="14213D"/>
                 </a:solidFill>
                 <a:latin typeface="맑은 고딕"/>
+                <a:ea typeface="맑은 고딕"/>
+                <a:cs typeface="맑은 고딕"/>
               </a:rPr>
               <a:t>PART 02</a:t>
             </a:r>
@@ -9370,6 +9540,8 @@
                   <a:srgbClr val="FFFFFF"/>
                 </a:solidFill>
                 <a:latin typeface="맑은 고딕"/>
+                <a:ea typeface="맑은 고딕"/>
+                <a:cs typeface="맑은 고딕"/>
               </a:rPr>
               <a:t>Jenkins 아키텍처</a:t>
             </a:r>
@@ -9405,6 +9577,8 @@
                   <a:srgbClr val="C9D3E6"/>
                 </a:solidFill>
                 <a:latin typeface="맑은 고딕"/>
+                <a:ea typeface="맑은 고딕"/>
+                <a:cs typeface="맑은 고딕"/>
               </a:rPr>
               <a:t>CI/CD를 실행해주는 자동화 서버</a:t>
             </a:r>
@@ -9564,6 +9738,8 @@
                   <a:srgbClr val="14213D"/>
                 </a:solidFill>
                 <a:latin typeface="맑은 고딕"/>
+                <a:ea typeface="맑은 고딕"/>
+                <a:cs typeface="맑은 고딕"/>
               </a:rPr>
               <a:t>02</a:t>
             </a:r>
@@ -9599,6 +9775,8 @@
                   <a:srgbClr val="14B8A6"/>
                 </a:solidFill>
                 <a:latin typeface="맑은 고딕"/>
+                <a:ea typeface="맑은 고딕"/>
+                <a:cs typeface="맑은 고딕"/>
               </a:rPr>
               <a:t>PART 2 · Jenkins 아키텍처</a:t>
             </a:r>
@@ -9634,6 +9812,8 @@
                   <a:srgbClr val="FFFFFF"/>
                 </a:solidFill>
                 <a:latin typeface="맑은 고딕"/>
+                <a:ea typeface="맑은 고딕"/>
+                <a:cs typeface="맑은 고딕"/>
               </a:rPr>
               <a:t>Jenkins의 핵심 구성요소</a:t>
             </a:r>
@@ -9673,6 +9853,8 @@
                   <a:srgbClr val="0D9488"/>
                 </a:solidFill>
                 <a:latin typeface="맑은 고딕"/>
+                <a:ea typeface="맑은 고딕"/>
+                <a:cs typeface="맑은 고딕"/>
               </a:rPr>
               <a:t>●  </a:t>
             </a:r>
@@ -9682,6 +9864,8 @@
                   <a:srgbClr val="222733"/>
                 </a:solidFill>
                 <a:latin typeface="맑은 고딕"/>
+                <a:ea typeface="맑은 고딕"/>
+                <a:cs typeface="맑은 고딕"/>
               </a:rPr>
               <a:t>Jenkins 서버 — 웹 UI를 통해 자동화 작업을 관리하는 자동화 서버</a:t>
             </a:r>
@@ -9698,6 +9882,8 @@
                   <a:srgbClr val="0D9488"/>
                 </a:solidFill>
                 <a:latin typeface="맑은 고딕"/>
+                <a:ea typeface="맑은 고딕"/>
+                <a:cs typeface="맑은 고딕"/>
               </a:rPr>
               <a:t>●  </a:t>
             </a:r>
@@ -9707,6 +9893,8 @@
                   <a:srgbClr val="222733"/>
                 </a:solidFill>
                 <a:latin typeface="맑은 고딕"/>
+                <a:ea typeface="맑은 고딕"/>
+                <a:cs typeface="맑은 고딕"/>
               </a:rPr>
               <a:t>Job(작업) — '무엇을, 어떻게 빌드·배포할지'를 정의한 단위</a:t>
             </a:r>
@@ -9723,6 +9911,8 @@
                   <a:srgbClr val="0D9488"/>
                 </a:solidFill>
                 <a:latin typeface="맑은 고딕"/>
+                <a:ea typeface="맑은 고딕"/>
+                <a:cs typeface="맑은 고딕"/>
               </a:rPr>
               <a:t>●  </a:t>
             </a:r>
@@ -9732,6 +9922,8 @@
                   <a:srgbClr val="222733"/>
                 </a:solidFill>
                 <a:latin typeface="맑은 고딕"/>
+                <a:ea typeface="맑은 고딕"/>
+                <a:cs typeface="맑은 고딕"/>
               </a:rPr>
               <a:t>Build — Job이 실제로 한 번 실행된 결과(성공/실패, 로그, 산출물)</a:t>
             </a:r>
@@ -9748,6 +9940,8 @@
                   <a:srgbClr val="0D9488"/>
                 </a:solidFill>
                 <a:latin typeface="맑은 고딕"/>
+                <a:ea typeface="맑은 고딕"/>
+                <a:cs typeface="맑은 고딕"/>
               </a:rPr>
               <a:t>●  </a:t>
             </a:r>
@@ -9757,6 +9951,8 @@
                   <a:srgbClr val="222733"/>
                 </a:solidFill>
                 <a:latin typeface="맑은 고딕"/>
+                <a:ea typeface="맑은 고딕"/>
+                <a:cs typeface="맑은 고딕"/>
               </a:rPr>
               <a:t>Plugin — Git 연동, Docker 연동처럼 Jenkins 기능을 확장하는 부품</a:t>
             </a:r>
@@ -9792,6 +9988,8 @@
                   <a:srgbClr val="14213D"/>
                 </a:solidFill>
                 <a:latin typeface="맑은 고딕"/>
+                <a:ea typeface="맑은 고딕"/>
+                <a:cs typeface="맑은 고딕"/>
               </a:rPr>
               <a:t>Jenkins 구성 요소</a:t>
             </a:r>
@@ -9871,6 +10069,8 @@
                   <a:srgbClr val="FFFFFF"/>
                 </a:solidFill>
                 <a:latin typeface="맑은 고딕"/>
+                <a:ea typeface="맑은 고딕"/>
+                <a:cs typeface="맑은 고딕"/>
               </a:rPr>
               <a:t>Jenkins 서버</a:t>
             </a:r>
@@ -9950,6 +10150,8 @@
                   <a:srgbClr val="FFFFFF"/>
                 </a:solidFill>
                 <a:latin typeface="맑은 고딕"/>
+                <a:ea typeface="맑은 고딕"/>
+                <a:cs typeface="맑은 고딕"/>
               </a:rPr>
               <a:t>└ Job (빌드 설정)</a:t>
             </a:r>
@@ -10029,6 +10231,8 @@
                   <a:srgbClr val="FFFFFF"/>
                 </a:solidFill>
                 <a:latin typeface="맑은 고딕"/>
+                <a:ea typeface="맑은 고딕"/>
+                <a:cs typeface="맑은 고딕"/>
               </a:rPr>
               <a:t>    └ Build #1, #2, #3 ... (실행 이력)</a:t>
             </a:r>
@@ -10064,6 +10268,8 @@
                   <a:srgbClr val="5B6373"/>
                 </a:solidFill>
                 <a:latin typeface="맑은 고딕"/>
+                <a:ea typeface="맑은 고딕"/>
+                <a:cs typeface="맑은 고딕"/>
               </a:rPr>
               <a:t>클라우드인프라관리  ·  11주차 1차시</a:t>
             </a:r>
@@ -10099,6 +10305,8 @@
                   <a:srgbClr val="5B6373"/>
                 </a:solidFill>
                 <a:latin typeface="맑은 고딕"/>
+                <a:ea typeface="맑은 고딕"/>
+                <a:cs typeface="맑은 고딕"/>
               </a:rPr>
               <a:t>08 / 13</a:t>
             </a:r>
@@ -10302,6 +10510,8 @@
                   <a:srgbClr val="14213D"/>
                 </a:solidFill>
                 <a:latin typeface="맑은 고딕"/>
+                <a:ea typeface="맑은 고딕"/>
+                <a:cs typeface="맑은 고딕"/>
               </a:rPr>
               <a:t>02</a:t>
             </a:r>
@@ -10337,6 +10547,8 @@
                   <a:srgbClr val="14B8A6"/>
                 </a:solidFill>
                 <a:latin typeface="맑은 고딕"/>
+                <a:ea typeface="맑은 고딕"/>
+                <a:cs typeface="맑은 고딕"/>
               </a:rPr>
               <a:t>PART 2 · Jenkins 아키텍처</a:t>
             </a:r>
@@ -10372,6 +10584,8 @@
                   <a:srgbClr val="FFFFFF"/>
                 </a:solidFill>
                 <a:latin typeface="맑은 고딕"/>
+                <a:ea typeface="맑은 고딕"/>
+                <a:cs typeface="맑은 고딕"/>
               </a:rPr>
               <a:t>이번 학기 Jenkins 활용 로드맵</a:t>
             </a:r>
@@ -10411,6 +10625,8 @@
                   <a:srgbClr val="0D9488"/>
                 </a:solidFill>
                 <a:latin typeface="맑은 고딕"/>
+                <a:ea typeface="맑은 고딕"/>
+                <a:cs typeface="맑은 고딕"/>
               </a:rPr>
               <a:t>●  </a:t>
             </a:r>
@@ -10420,6 +10636,8 @@
                   <a:srgbClr val="222733"/>
                 </a:solidFill>
                 <a:latin typeface="맑은 고딕"/>
+                <a:ea typeface="맑은 고딕"/>
+                <a:cs typeface="맑은 고딕"/>
               </a:rPr>
               <a:t>11주차(오늘) — Jenkins 서버를 설치하고 첫 Job을 만들어 UI에 익숙해짐</a:t>
             </a:r>
@@ -10436,6 +10654,8 @@
                   <a:srgbClr val="0D9488"/>
                 </a:solidFill>
                 <a:latin typeface="맑은 고딕"/>
+                <a:ea typeface="맑은 고딕"/>
+                <a:cs typeface="맑은 고딕"/>
               </a:rPr>
               <a:t>●  </a:t>
             </a:r>
@@ -10445,6 +10665,8 @@
                   <a:srgbClr val="222733"/>
                 </a:solidFill>
                 <a:latin typeface="맑은 고딕"/>
+                <a:ea typeface="맑은 고딕"/>
+                <a:cs typeface="맑은 고딕"/>
               </a:rPr>
               <a:t>12주차 — Jenkinsfile로 빌드 과정을 코드로 작성하고, GitHub과 자동 연동</a:t>
             </a:r>
@@ -10461,6 +10683,8 @@
                   <a:srgbClr val="0D9488"/>
                 </a:solidFill>
                 <a:latin typeface="맑은 고딕"/>
+                <a:ea typeface="맑은 고딕"/>
+                <a:cs typeface="맑은 고딕"/>
               </a:rPr>
               <a:t>●  </a:t>
             </a:r>
@@ -10470,6 +10694,8 @@
                   <a:srgbClr val="222733"/>
                 </a:solidFill>
                 <a:latin typeface="맑은 고딕"/>
+                <a:ea typeface="맑은 고딕"/>
+                <a:cs typeface="맑은 고딕"/>
               </a:rPr>
               <a:t>13주차 — Git→Jenkins→Docker Hub→K8s로 이어지는 전체 파이프라인 완성</a:t>
             </a:r>
@@ -10505,6 +10731,8 @@
                   <a:srgbClr val="5B6373"/>
                 </a:solidFill>
                 <a:latin typeface="맑은 고딕"/>
+                <a:ea typeface="맑은 고딕"/>
+                <a:cs typeface="맑은 고딕"/>
               </a:rPr>
               <a:t>클라우드인프라관리  ·  11주차 1차시</a:t>
             </a:r>
@@ -10540,6 +10768,8 @@
                   <a:srgbClr val="5B6373"/>
                 </a:solidFill>
                 <a:latin typeface="맑은 고딕"/>
+                <a:ea typeface="맑은 고딕"/>
+                <a:cs typeface="맑은 고딕"/>
               </a:rPr>
               <a:t>09 / 13</a:t>
             </a:r>
